--- a/Misc/DB-Notes.pptx
+++ b/Misc/DB-Notes.pptx
@@ -5,10 +5,10 @@
     <p:sldMasterId id="2147483648" r:id="rId1"/>
   </p:sldMasterIdLst>
   <p:notesMasterIdLst>
-    <p:notesMasterId r:id="rId27"/>
+    <p:notesMasterId r:id="rId28"/>
   </p:notesMasterIdLst>
   <p:handoutMasterIdLst>
-    <p:handoutMasterId r:id="rId28"/>
+    <p:handoutMasterId r:id="rId29"/>
   </p:handoutMasterIdLst>
   <p:sldIdLst>
     <p:sldId id="409" r:id="rId3"/>
@@ -26,20 +26,21 @@
     <p:sldId id="417" r:id="rId15"/>
     <p:sldId id="419" r:id="rId16"/>
     <p:sldId id="453" r:id="rId17"/>
-    <p:sldId id="423" r:id="rId18"/>
-    <p:sldId id="457" r:id="rId19"/>
-    <p:sldId id="455" r:id="rId20"/>
-    <p:sldId id="456" r:id="rId21"/>
-    <p:sldId id="463" r:id="rId22"/>
-    <p:sldId id="464" r:id="rId23"/>
-    <p:sldId id="454" r:id="rId24"/>
-    <p:sldId id="422" r:id="rId25"/>
-    <p:sldId id="425" r:id="rId26"/>
+    <p:sldId id="468" r:id="rId18"/>
+    <p:sldId id="423" r:id="rId19"/>
+    <p:sldId id="457" r:id="rId20"/>
+    <p:sldId id="455" r:id="rId21"/>
+    <p:sldId id="456" r:id="rId22"/>
+    <p:sldId id="463" r:id="rId23"/>
+    <p:sldId id="464" r:id="rId24"/>
+    <p:sldId id="454" r:id="rId25"/>
+    <p:sldId id="422" r:id="rId26"/>
+    <p:sldId id="425" r:id="rId27"/>
   </p:sldIdLst>
   <p:sldSz cx="12192000" cy="6858000"/>
   <p:notesSz cx="6858000" cy="9144000"/>
   <p:custDataLst>
-    <p:tags r:id="rId32"/>
+    <p:tags r:id="rId33"/>
   </p:custDataLst>
   <p:defaultTextStyle>
     <a:defPPr>
@@ -4825,6 +4826,73 @@
           <a:p>
             <a:r>
               <a:rPr lang="en-US" altLang="zh-CN"/>
+              <a:t>Versions</a:t>
+            </a:r>
+            <a:endParaRPr lang="en-US" altLang="zh-CN"/>
+          </a:p>
+        </p:txBody>
+      </p:sp>
+      <p:pic>
+        <p:nvPicPr>
+          <p:cNvPr id="4" name="图片 3"/>
+          <p:cNvPicPr>
+            <a:picLocks noChangeAspect="1"/>
+          </p:cNvPicPr>
+          <p:nvPr/>
+        </p:nvPicPr>
+        <p:blipFill>
+          <a:blip r:embed="rId1"/>
+          <a:stretch>
+            <a:fillRect/>
+          </a:stretch>
+        </p:blipFill>
+        <p:spPr>
+          <a:xfrm>
+            <a:off x="1621790" y="1268095"/>
+            <a:ext cx="8526780" cy="4953000"/>
+          </a:xfrm>
+          <a:prstGeom prst="rect">
+            <a:avLst/>
+          </a:prstGeom>
+        </p:spPr>
+      </p:pic>
+    </p:spTree>
+    <p:custDataLst>
+      <p:tags r:id="rId2"/>
+    </p:custDataLst>
+  </p:cSld>
+  <p:clrMapOvr>
+    <a:masterClrMapping/>
+  </p:clrMapOvr>
+</p:sld>
+</file>
+
+<file path=ppt/slides/slide17.xml><?xml version="1.0" encoding="utf-8"?>
+<p:sld xmlns:a="http://schemas.openxmlformats.org/drawingml/2006/main" xmlns:r="http://schemas.openxmlformats.org/officeDocument/2006/relationships" xmlns:p="http://schemas.openxmlformats.org/presentationml/2006/main">
+  <p:cSld>
+    <p:spTree>
+      <p:nvGrpSpPr>
+        <p:cNvPr id="1" name=""/>
+        <p:cNvGrpSpPr/>
+        <p:nvPr/>
+      </p:nvGrpSpPr>
+      <p:grpSpPr/>
+      <p:sp>
+        <p:nvSpPr>
+          <p:cNvPr id="2" name="标题 1"/>
+          <p:cNvSpPr>
+            <a:spLocks noGrp="1"/>
+          </p:cNvSpPr>
+          <p:nvPr>
+            <p:ph type="title"/>
+          </p:nvPr>
+        </p:nvSpPr>
+        <p:spPr/>
+        <p:txBody>
+          <a:bodyPr/>
+          <a:p>
+            <a:r>
+              <a:rPr lang="en-US" altLang="zh-CN"/>
               <a:t>SQL Server</a:t>
             </a:r>
             <a:endParaRPr lang="en-US" altLang="zh-CN"/>
@@ -4945,81 +5013,6 @@
 </p:sld>
 </file>
 
-<file path=ppt/slides/slide17.xml><?xml version="1.0" encoding="utf-8"?>
-<p:sld xmlns:a="http://schemas.openxmlformats.org/drawingml/2006/main" xmlns:r="http://schemas.openxmlformats.org/officeDocument/2006/relationships" xmlns:p="http://schemas.openxmlformats.org/presentationml/2006/main">
-  <p:cSld>
-    <p:spTree>
-      <p:nvGrpSpPr>
-        <p:cNvPr id="1" name=""/>
-        <p:cNvGrpSpPr/>
-        <p:nvPr/>
-      </p:nvGrpSpPr>
-      <p:grpSpPr/>
-      <p:sp>
-        <p:nvSpPr>
-          <p:cNvPr id="2" name="标题 1"/>
-          <p:cNvSpPr>
-            <a:spLocks noGrp="1"/>
-          </p:cNvSpPr>
-          <p:nvPr>
-            <p:ph type="title"/>
-          </p:nvPr>
-        </p:nvSpPr>
-        <p:spPr/>
-        <p:txBody>
-          <a:bodyPr>
-            <a:normAutofit fontScale="90000"/>
-          </a:bodyPr>
-          <a:p>
-            <a:r>
-              <a:rPr lang="en-US" altLang="zh-CN"/>
-              <a:t>SSMS (SQL Server Management Studio)</a:t>
-            </a:r>
-            <a:endParaRPr lang="en-US" altLang="zh-CN"/>
-          </a:p>
-        </p:txBody>
-      </p:sp>
-      <p:sp>
-        <p:nvSpPr>
-          <p:cNvPr id="3" name="内容占位符 2"/>
-          <p:cNvSpPr>
-            <a:spLocks noGrp="1"/>
-          </p:cNvSpPr>
-          <p:nvPr>
-            <p:ph idx="1"/>
-          </p:nvPr>
-        </p:nvSpPr>
-        <p:spPr/>
-        <p:txBody>
-          <a:bodyPr/>
-          <a:p>
-            <a:r>
-              <a:rPr lang="en-US" altLang="zh-CN"/>
-              <a:t>References</a:t>
-            </a:r>
-            <a:endParaRPr lang="en-US" altLang="zh-CN"/>
-          </a:p>
-          <a:p>
-            <a:pPr lvl="1"/>
-            <a:r>
-              <a:rPr lang="en-US" altLang="zh-CN"/>
-              <a:t>https://learn.microsoft.com/zh-cn/sql/ssms/download-sql-server-management-studio-ssms?view=sql-server-ver16&amp;redirectedfrom=MSDN</a:t>
-            </a:r>
-            <a:endParaRPr lang="en-US" altLang="zh-CN"/>
-          </a:p>
-        </p:txBody>
-      </p:sp>
-    </p:spTree>
-    <p:custDataLst>
-      <p:tags r:id="rId1"/>
-    </p:custDataLst>
-  </p:cSld>
-  <p:clrMapOvr>
-    <a:masterClrMapping/>
-  </p:clrMapOvr>
-</p:sld>
-</file>
-
 <file path=ppt/slides/slide18.xml><?xml version="1.0" encoding="utf-8"?>
 <p:sld xmlns:a="http://schemas.openxmlformats.org/drawingml/2006/main" xmlns:r="http://schemas.openxmlformats.org/officeDocument/2006/relationships" xmlns:p="http://schemas.openxmlformats.org/presentationml/2006/main">
   <p:cSld>
@@ -5042,32 +5035,34 @@
         </p:nvSpPr>
         <p:spPr/>
         <p:txBody>
+          <a:bodyPr>
+            <a:normAutofit fontScale="90000"/>
+          </a:bodyPr>
+          <a:p>
+            <a:r>
+              <a:rPr lang="en-US" altLang="zh-CN"/>
+              <a:t>SSMS (SQL Server Management Studio)</a:t>
+            </a:r>
+            <a:endParaRPr lang="en-US" altLang="zh-CN"/>
+          </a:p>
+        </p:txBody>
+      </p:sp>
+      <p:sp>
+        <p:nvSpPr>
+          <p:cNvPr id="3" name="内容占位符 2"/>
+          <p:cNvSpPr>
+            <a:spLocks noGrp="1"/>
+          </p:cNvSpPr>
+          <p:nvPr>
+            <p:ph idx="1"/>
+          </p:nvPr>
+        </p:nvSpPr>
+        <p:spPr/>
+        <p:txBody>
           <a:bodyPr/>
           <a:p>
             <a:r>
               <a:rPr lang="en-US" altLang="zh-CN"/>
-              <a:t>Connect from Ubuntu 20</a:t>
-            </a:r>
-            <a:endParaRPr lang="en-US" altLang="zh-CN"/>
-          </a:p>
-        </p:txBody>
-      </p:sp>
-      <p:sp>
-        <p:nvSpPr>
-          <p:cNvPr id="3" name="内容占位符 2"/>
-          <p:cNvSpPr>
-            <a:spLocks noGrp="1"/>
-          </p:cNvSpPr>
-          <p:nvPr>
-            <p:ph idx="1"/>
-          </p:nvPr>
-        </p:nvSpPr>
-        <p:spPr/>
-        <p:txBody>
-          <a:bodyPr/>
-          <a:p>
-            <a:r>
-              <a:rPr lang="en-US" altLang="zh-CN"/>
               <a:t>References</a:t>
             </a:r>
             <a:endParaRPr lang="en-US" altLang="zh-CN"/>
@@ -5076,79 +5071,8 @@
             <a:pPr lvl="1"/>
             <a:r>
               <a:rPr lang="en-US" altLang="zh-CN"/>
-              <a:t>https://learn.microsoft.com/en-us/sql/linux/sql-server-linux-setup-tools?tabs=ubuntu-install&amp;view=sql-server-ver16#ubuntu</a:t>
-            </a:r>
-            <a:endParaRPr lang="en-US" altLang="zh-CN"/>
-          </a:p>
-          <a:p>
-            <a:r>
-              <a:rPr lang="en-US" altLang="zh-CN"/>
-              <a:t>Commands</a:t>
-            </a:r>
-            <a:endParaRPr lang="en-US" altLang="zh-CN"/>
-          </a:p>
-          <a:p>
-            <a:pPr lvl="1"/>
-            <a:r>
-              <a:rPr lang="en-US" altLang="zh-CN"/>
-              <a:t>curl https://packages.microsoft.com/keys/microsoft.asc | sudo tee /etc/apt/trusted.gpg.d/microsoft.asc	// Import the public repository GPG keys</a:t>
-            </a:r>
-            <a:endParaRPr lang="en-US" altLang="zh-CN"/>
-          </a:p>
-          <a:p>
-            <a:pPr lvl="1"/>
-            <a:r>
-              <a:rPr lang="en-US" altLang="zh-CN"/>
-              <a:t>curl https://packages.microsoft.com/config/ubuntu/20.04/prod.list | sudo tee /etc/apt/sources.list.d/mssql-release.list	// Register repository</a:t>
-            </a:r>
-            <a:endParaRPr lang="en-US" altLang="zh-CN"/>
-          </a:p>
-          <a:p>
-            <a:pPr lvl="1"/>
-            <a:r>
-              <a:rPr lang="en-US" altLang="zh-CN"/>
-              <a:t>sudo apt-get update</a:t>
-            </a:r>
-            <a:endParaRPr lang="en-US" altLang="zh-CN"/>
-          </a:p>
-          <a:p>
-            <a:pPr lvl="1"/>
-            <a:r>
-              <a:rPr lang="en-US" altLang="zh-CN"/>
-              <a:t>sudo apt-get install mssql-tools18 unixodbc-dev</a:t>
-            </a:r>
-            <a:endParaRPr lang="en-US" altLang="zh-CN"/>
-          </a:p>
-          <a:p>
-            <a:pPr lvl="1"/>
-            <a:r>
-              <a:rPr lang="en-US" altLang="zh-CN"/>
-              <a:t>echo 'export PATH="$PATH:/opt/mssql-tools18/bin"' &gt;&gt; ~/.bashrc</a:t>
-            </a:r>
-            <a:endParaRPr lang="en-US" altLang="zh-CN"/>
-          </a:p>
-          <a:p>
-            <a:pPr lvl="1"/>
-            <a:r>
-              <a:rPr lang="en-US" altLang="zh-CN"/>
-              <a:t>source ~/.bashrc</a:t>
-            </a:r>
-            <a:endParaRPr lang="en-US" altLang="zh-CN"/>
-          </a:p>
-          <a:p>
-            <a:pPr lvl="1"/>
-            <a:r>
-              <a:rPr lang="en-US" altLang="zh-CN"/>
-              <a:t>sqlcmd -?</a:t>
-            </a:r>
-            <a:endParaRPr lang="en-US" altLang="zh-CN"/>
-          </a:p>
-          <a:p>
-            <a:pPr lvl="1"/>
-            <a:endParaRPr lang="en-US" altLang="zh-CN"/>
-          </a:p>
-          <a:p>
-            <a:pPr lvl="1"/>
+              <a:t>https://learn.microsoft.com/zh-cn/sql/ssms/download-sql-server-management-studio-ssms?view=sql-server-ver16&amp;redirectedfrom=MSDN</a:t>
+            </a:r>
             <a:endParaRPr lang="en-US" altLang="zh-CN"/>
           </a:p>
         </p:txBody>
@@ -5190,7 +5114,7 @@
           <a:p>
             <a:r>
               <a:rPr lang="en-US" altLang="zh-CN"/>
-              <a:t>sqlcmd</a:t>
+              <a:t>Connect from Ubuntu 20</a:t>
             </a:r>
             <a:endParaRPr lang="en-US" altLang="zh-CN"/>
           </a:p>
@@ -5212,6 +5136,21 @@
           <a:p>
             <a:r>
               <a:rPr lang="en-US" altLang="zh-CN"/>
+              <a:t>References</a:t>
+            </a:r>
+            <a:endParaRPr lang="en-US" altLang="zh-CN"/>
+          </a:p>
+          <a:p>
+            <a:pPr lvl="1"/>
+            <a:r>
+              <a:rPr lang="en-US" altLang="zh-CN"/>
+              <a:t>https://learn.microsoft.com/en-us/sql/linux/sql-server-linux-setup-tools?tabs=ubuntu-install&amp;view=sql-server-ver16#ubuntu</a:t>
+            </a:r>
+            <a:endParaRPr lang="en-US" altLang="zh-CN"/>
+          </a:p>
+          <a:p>
+            <a:r>
+              <a:rPr lang="en-US" altLang="zh-CN"/>
               <a:t>Commands</a:t>
             </a:r>
             <a:endParaRPr lang="en-US" altLang="zh-CN"/>
@@ -5220,8 +5159,64 @@
             <a:pPr lvl="1"/>
             <a:r>
               <a:rPr lang="en-US" altLang="zh-CN"/>
-              <a:t>sqlcmd -S tcp:&lt;computer name&gt;,&lt;port number&gt;</a:t>
-            </a:r>
+              <a:t>curl https://packages.microsoft.com/keys/microsoft.asc | sudo tee /etc/apt/trusted.gpg.d/microsoft.asc	// Import the public repository GPG keys</a:t>
+            </a:r>
+            <a:endParaRPr lang="en-US" altLang="zh-CN"/>
+          </a:p>
+          <a:p>
+            <a:pPr lvl="1"/>
+            <a:r>
+              <a:rPr lang="en-US" altLang="zh-CN"/>
+              <a:t>curl https://packages.microsoft.com/config/ubuntu/20.04/prod.list | sudo tee /etc/apt/sources.list.d/mssql-release.list	// Register repository</a:t>
+            </a:r>
+            <a:endParaRPr lang="en-US" altLang="zh-CN"/>
+          </a:p>
+          <a:p>
+            <a:pPr lvl="1"/>
+            <a:r>
+              <a:rPr lang="en-US" altLang="zh-CN"/>
+              <a:t>sudo apt-get update</a:t>
+            </a:r>
+            <a:endParaRPr lang="en-US" altLang="zh-CN"/>
+          </a:p>
+          <a:p>
+            <a:pPr lvl="1"/>
+            <a:r>
+              <a:rPr lang="en-US" altLang="zh-CN"/>
+              <a:t>sudo apt-get install mssql-tools18 unixodbc-dev</a:t>
+            </a:r>
+            <a:endParaRPr lang="en-US" altLang="zh-CN"/>
+          </a:p>
+          <a:p>
+            <a:pPr lvl="1"/>
+            <a:r>
+              <a:rPr lang="en-US" altLang="zh-CN"/>
+              <a:t>echo 'export PATH="$PATH:/opt/mssql-tools18/bin"' &gt;&gt; ~/.bashrc</a:t>
+            </a:r>
+            <a:endParaRPr lang="en-US" altLang="zh-CN"/>
+          </a:p>
+          <a:p>
+            <a:pPr lvl="1"/>
+            <a:r>
+              <a:rPr lang="en-US" altLang="zh-CN"/>
+              <a:t>source ~/.bashrc</a:t>
+            </a:r>
+            <a:endParaRPr lang="en-US" altLang="zh-CN"/>
+          </a:p>
+          <a:p>
+            <a:pPr lvl="1"/>
+            <a:r>
+              <a:rPr lang="en-US" altLang="zh-CN"/>
+              <a:t>sqlcmd -?</a:t>
+            </a:r>
+            <a:endParaRPr lang="en-US" altLang="zh-CN"/>
+          </a:p>
+          <a:p>
+            <a:pPr lvl="1"/>
+            <a:endParaRPr lang="en-US" altLang="zh-CN"/>
+          </a:p>
+          <a:p>
+            <a:pPr lvl="1"/>
             <a:endParaRPr lang="en-US" altLang="zh-CN"/>
           </a:p>
         </p:txBody>
@@ -6162,7 +6157,7 @@
       <p:grpSpPr/>
       <p:sp>
         <p:nvSpPr>
-          <p:cNvPr id="4" name="标题 3"/>
+          <p:cNvPr id="2" name="标题 1"/>
           <p:cNvSpPr>
             <a:spLocks noGrp="1"/>
           </p:cNvSpPr>
@@ -6176,27 +6171,39 @@
           <a:p>
             <a:r>
               <a:rPr lang="en-US" altLang="zh-CN"/>
-              <a:t>MySQL</a:t>
-            </a:r>
-            <a:endParaRPr lang="en-US" altLang="zh-CN"/>
-          </a:p>
-        </p:txBody>
-      </p:sp>
-      <p:sp>
-        <p:nvSpPr>
-          <p:cNvPr id="5" name="文本占位符 4"/>
-          <p:cNvSpPr>
-            <a:spLocks noGrp="1"/>
-          </p:cNvSpPr>
-          <p:nvPr>
-            <p:ph type="body" idx="1"/>
+              <a:t>sqlcmd</a:t>
+            </a:r>
+            <a:endParaRPr lang="en-US" altLang="zh-CN"/>
+          </a:p>
+        </p:txBody>
+      </p:sp>
+      <p:sp>
+        <p:nvSpPr>
+          <p:cNvPr id="3" name="内容占位符 2"/>
+          <p:cNvSpPr>
+            <a:spLocks noGrp="1"/>
+          </p:cNvSpPr>
+          <p:nvPr>
+            <p:ph idx="1"/>
           </p:nvPr>
         </p:nvSpPr>
         <p:spPr/>
         <p:txBody>
           <a:bodyPr/>
           <a:p>
-            <a:endParaRPr lang="zh-CN" altLang="en-US"/>
+            <a:r>
+              <a:rPr lang="en-US" altLang="zh-CN"/>
+              <a:t>Commands</a:t>
+            </a:r>
+            <a:endParaRPr lang="en-US" altLang="zh-CN"/>
+          </a:p>
+          <a:p>
+            <a:pPr lvl="1"/>
+            <a:r>
+              <a:rPr lang="en-US" altLang="zh-CN"/>
+              <a:t>sqlcmd -S tcp:&lt;computer name&gt;,&lt;port number&gt;</a:t>
+            </a:r>
+            <a:endParaRPr lang="en-US" altLang="zh-CN"/>
           </a:p>
         </p:txBody>
       </p:sp>
@@ -6223,7 +6230,7 @@
       <p:grpSpPr/>
       <p:sp>
         <p:nvSpPr>
-          <p:cNvPr id="2" name="标题 1"/>
+          <p:cNvPr id="4" name="标题 3"/>
           <p:cNvSpPr>
             <a:spLocks noGrp="1"/>
           </p:cNvSpPr>
@@ -6237,87 +6244,27 @@
           <a:p>
             <a:r>
               <a:rPr lang="en-US" altLang="zh-CN"/>
-              <a:t>Client</a:t>
-            </a:r>
-            <a:endParaRPr lang="en-US" altLang="zh-CN"/>
-          </a:p>
-        </p:txBody>
-      </p:sp>
-      <p:sp>
-        <p:nvSpPr>
-          <p:cNvPr id="3" name="内容占位符 2"/>
-          <p:cNvSpPr>
-            <a:spLocks noGrp="1"/>
-          </p:cNvSpPr>
-          <p:nvPr>
-            <p:ph idx="1"/>
+              <a:t>MySQL</a:t>
+            </a:r>
+            <a:endParaRPr lang="en-US" altLang="zh-CN"/>
+          </a:p>
+        </p:txBody>
+      </p:sp>
+      <p:sp>
+        <p:nvSpPr>
+          <p:cNvPr id="5" name="文本占位符 4"/>
+          <p:cNvSpPr>
+            <a:spLocks noGrp="1"/>
+          </p:cNvSpPr>
+          <p:nvPr>
+            <p:ph type="body" idx="1"/>
           </p:nvPr>
         </p:nvSpPr>
         <p:spPr/>
         <p:txBody>
           <a:bodyPr/>
           <a:p>
-            <a:r>
-              <a:rPr lang="en-US" altLang="zh-CN"/>
-              <a:t>mycli</a:t>
-            </a:r>
-            <a:endParaRPr lang="en-US" altLang="zh-CN"/>
-          </a:p>
-          <a:p>
-            <a:pPr lvl="1"/>
-            <a:r>
-              <a:rPr lang="en-US" altLang="zh-CN"/>
-              <a:t>https://thevaluable.dev/mysql-command-line-tool-mycli/</a:t>
-            </a:r>
-            <a:endParaRPr lang="en-US" altLang="zh-CN"/>
-          </a:p>
-          <a:p>
-            <a:pPr lvl="1"/>
-            <a:r>
-              <a:rPr lang="en-US" altLang="zh-CN"/>
-              <a:t>pip install mycli</a:t>
-            </a:r>
-            <a:endParaRPr lang="en-US" altLang="zh-CN"/>
-          </a:p>
-          <a:p>
-            <a:pPr lvl="1"/>
-            <a:r>
-              <a:rPr lang="en-US" altLang="zh-CN"/>
-              <a:t>mycli -h localhost -u root -P 3306</a:t>
-            </a:r>
-            <a:endParaRPr lang="en-US" altLang="zh-CN"/>
-          </a:p>
-          <a:p>
-            <a:pPr lvl="1"/>
-            <a:r>
-              <a:rPr lang="en-US" altLang="zh-CN"/>
-              <a:t>Commands</a:t>
-            </a:r>
-            <a:endParaRPr lang="en-US" altLang="zh-CN"/>
-          </a:p>
-          <a:p>
-            <a:pPr lvl="2"/>
-            <a:r>
-              <a:rPr lang="en-US" altLang="zh-CN"/>
-              <a:t>show databases</a:t>
-            </a:r>
-            <a:endParaRPr lang="en-US" altLang="zh-CN"/>
-          </a:p>
-          <a:p>
-            <a:pPr lvl="2"/>
-            <a:r>
-              <a:rPr lang="en-US" altLang="zh-CN"/>
-              <a:t>\l	# list databases</a:t>
-            </a:r>
-            <a:endParaRPr lang="en-US" altLang="zh-CN"/>
-          </a:p>
-          <a:p>
-            <a:pPr lvl="2"/>
-            <a:r>
-              <a:rPr lang="en-US" altLang="zh-CN"/>
-              <a:t>\dt	# dump tables</a:t>
-            </a:r>
-            <a:endParaRPr lang="en-US" altLang="zh-CN"/>
+            <a:endParaRPr lang="zh-CN" altLang="en-US"/>
           </a:p>
         </p:txBody>
       </p:sp>
@@ -6344,7 +6291,7 @@
       <p:grpSpPr/>
       <p:sp>
         <p:nvSpPr>
-          <p:cNvPr id="4" name="标题 3"/>
+          <p:cNvPr id="2" name="标题 1"/>
           <p:cNvSpPr>
             <a:spLocks noGrp="1"/>
           </p:cNvSpPr>
@@ -6358,27 +6305,137 @@
           <a:p>
             <a:r>
               <a:rPr lang="en-US" altLang="zh-CN"/>
-              <a:t>Misc</a:t>
-            </a:r>
-            <a:endParaRPr lang="en-US" altLang="zh-CN"/>
-          </a:p>
-        </p:txBody>
-      </p:sp>
-      <p:sp>
-        <p:nvSpPr>
-          <p:cNvPr id="5" name="文本占位符 4"/>
-          <p:cNvSpPr>
-            <a:spLocks noGrp="1"/>
-          </p:cNvSpPr>
-          <p:nvPr>
-            <p:ph type="body" idx="1"/>
+              <a:t>Client</a:t>
+            </a:r>
+            <a:endParaRPr lang="en-US" altLang="zh-CN"/>
+          </a:p>
+        </p:txBody>
+      </p:sp>
+      <p:sp>
+        <p:nvSpPr>
+          <p:cNvPr id="3" name="内容占位符 2"/>
+          <p:cNvSpPr>
+            <a:spLocks noGrp="1"/>
+          </p:cNvSpPr>
+          <p:nvPr>
+            <p:ph idx="1"/>
           </p:nvPr>
         </p:nvSpPr>
         <p:spPr/>
         <p:txBody>
-          <a:bodyPr/>
-          <a:p>
-            <a:endParaRPr lang="zh-CN" altLang="en-US"/>
+          <a:bodyPr>
+            <a:normAutofit lnSpcReduction="10000"/>
+          </a:bodyPr>
+          <a:p>
+            <a:r>
+              <a:rPr lang="en-US" altLang="zh-CN"/>
+              <a:t>mycli</a:t>
+            </a:r>
+            <a:endParaRPr lang="en-US" altLang="zh-CN"/>
+          </a:p>
+          <a:p>
+            <a:pPr lvl="1"/>
+            <a:r>
+              <a:rPr lang="en-US" altLang="zh-CN"/>
+              <a:t>https://thevaluable.dev/mysql-command-line-tool-mycli/</a:t>
+            </a:r>
+            <a:endParaRPr lang="en-US" altLang="zh-CN"/>
+          </a:p>
+          <a:p>
+            <a:pPr lvl="1"/>
+            <a:r>
+              <a:rPr lang="en-US" altLang="zh-CN"/>
+              <a:t>pip install mycli</a:t>
+            </a:r>
+            <a:endParaRPr lang="en-US" altLang="zh-CN"/>
+          </a:p>
+          <a:p>
+            <a:pPr lvl="1"/>
+            <a:r>
+              <a:rPr lang="en-US" altLang="zh-CN"/>
+              <a:t>mycli -h localhost -u root -P 3306</a:t>
+            </a:r>
+            <a:endParaRPr lang="en-US" altLang="zh-CN"/>
+          </a:p>
+          <a:p>
+            <a:pPr lvl="1"/>
+            <a:r>
+              <a:rPr lang="en-US" altLang="zh-CN"/>
+              <a:t>Commands</a:t>
+            </a:r>
+            <a:endParaRPr lang="en-US" altLang="zh-CN"/>
+          </a:p>
+          <a:p>
+            <a:pPr lvl="2"/>
+            <a:r>
+              <a:rPr lang="en-US" altLang="zh-CN"/>
+              <a:t>show databases</a:t>
+            </a:r>
+            <a:endParaRPr lang="en-US" altLang="zh-CN"/>
+          </a:p>
+          <a:p>
+            <a:pPr lvl="2"/>
+            <a:r>
+              <a:rPr lang="en-US" altLang="zh-CN"/>
+              <a:t>\l	# list databases</a:t>
+            </a:r>
+            <a:endParaRPr lang="en-US" altLang="zh-CN"/>
+          </a:p>
+          <a:p>
+            <a:pPr lvl="2"/>
+            <a:r>
+              <a:rPr lang="en-US" altLang="zh-CN"/>
+              <a:t>\dt	# dump tables</a:t>
+            </a:r>
+            <a:endParaRPr lang="en-US" altLang="zh-CN"/>
+          </a:p>
+          <a:p>
+            <a:pPr lvl="0"/>
+            <a:r>
+              <a:rPr lang="en-US" altLang="zh-CN"/>
+              <a:t>Usage</a:t>
+            </a:r>
+            <a:endParaRPr lang="en-US" altLang="zh-CN"/>
+          </a:p>
+          <a:p>
+            <a:pPr lvl="1"/>
+            <a:r>
+              <a:rPr lang="en-US" altLang="zh-CN"/>
+              <a:t>change password</a:t>
+            </a:r>
+            <a:endParaRPr lang="en-US" altLang="zh-CN"/>
+          </a:p>
+          <a:p>
+            <a:pPr lvl="2"/>
+            <a:r>
+              <a:rPr lang="en-US" altLang="zh-CN"/>
+              <a:t>mysql -u root -p</a:t>
+            </a:r>
+            <a:endParaRPr lang="en-US" altLang="zh-CN"/>
+          </a:p>
+          <a:p>
+            <a:pPr lvl="2"/>
+            <a:r>
+              <a:rPr lang="en-US" altLang="zh-CN"/>
+              <a:t>use mysql</a:t>
+            </a:r>
+            <a:endParaRPr lang="en-US" altLang="zh-CN"/>
+          </a:p>
+          <a:p>
+            <a:pPr lvl="2"/>
+            <a:r>
+              <a:rPr lang="en-US" altLang="zh-CN"/>
+              <a:t>update user set password=password("新密码") where user="root";</a:t>
+            </a:r>
+            <a:endParaRPr lang="en-US" altLang="zh-CN"/>
+          </a:p>
+          <a:p>
+            <a:pPr lvl="2"/>
+            <a:r>
+              <a:rPr lang="en-US" altLang="zh-CN"/>
+              <a:t>restart mysql service</a:t>
+            </a:r>
+            <a:endParaRPr lang="en-US" altLang="zh-CN"/>
           </a:p>
         </p:txBody>
       </p:sp>
@@ -6405,7 +6462,7 @@
       <p:grpSpPr/>
       <p:sp>
         <p:nvSpPr>
-          <p:cNvPr id="2" name="标题 1"/>
+          <p:cNvPr id="4" name="标题 3"/>
           <p:cNvSpPr>
             <a:spLocks noGrp="1"/>
           </p:cNvSpPr>
@@ -6419,39 +6476,27 @@
           <a:p>
             <a:r>
               <a:rPr lang="en-US" altLang="zh-CN"/>
-              <a:t>Visualization</a:t>
-            </a:r>
-            <a:endParaRPr lang="en-US" altLang="zh-CN"/>
-          </a:p>
-        </p:txBody>
-      </p:sp>
-      <p:sp>
-        <p:nvSpPr>
-          <p:cNvPr id="3" name="内容占位符 2"/>
-          <p:cNvSpPr>
-            <a:spLocks noGrp="1"/>
-          </p:cNvSpPr>
-          <p:nvPr>
-            <p:ph idx="1"/>
+              <a:t>Misc</a:t>
+            </a:r>
+            <a:endParaRPr lang="en-US" altLang="zh-CN"/>
+          </a:p>
+        </p:txBody>
+      </p:sp>
+      <p:sp>
+        <p:nvSpPr>
+          <p:cNvPr id="5" name="文本占位符 4"/>
+          <p:cNvSpPr>
+            <a:spLocks noGrp="1"/>
+          </p:cNvSpPr>
+          <p:nvPr>
+            <p:ph type="body" idx="1"/>
           </p:nvPr>
         </p:nvSpPr>
         <p:spPr/>
         <p:txBody>
           <a:bodyPr/>
           <a:p>
-            <a:r>
-              <a:rPr lang="en-US" altLang="zh-CN"/>
-              <a:t>Grafana</a:t>
-            </a:r>
-            <a:endParaRPr lang="en-US" altLang="zh-CN"/>
-          </a:p>
-          <a:p>
-            <a:pPr lvl="1"/>
-            <a:r>
-              <a:rPr lang="en-US" altLang="zh-CN"/>
-              <a:t>https://medium.com/analytics-vidhya/grafana-with-postgresql-data-visualization-with-open-source-tool-36f5150fa290</a:t>
-            </a:r>
-            <a:endParaRPr lang="en-US" altLang="zh-CN"/>
+            <a:endParaRPr lang="zh-CN" altLang="en-US"/>
           </a:p>
         </p:txBody>
       </p:sp>
@@ -6467,6 +6512,79 @@
 </file>
 
 <file path=ppt/slides/slide24.xml><?xml version="1.0" encoding="utf-8"?>
+<p:sld xmlns:a="http://schemas.openxmlformats.org/drawingml/2006/main" xmlns:r="http://schemas.openxmlformats.org/officeDocument/2006/relationships" xmlns:p="http://schemas.openxmlformats.org/presentationml/2006/main">
+  <p:cSld>
+    <p:spTree>
+      <p:nvGrpSpPr>
+        <p:cNvPr id="1" name=""/>
+        <p:cNvGrpSpPr/>
+        <p:nvPr/>
+      </p:nvGrpSpPr>
+      <p:grpSpPr/>
+      <p:sp>
+        <p:nvSpPr>
+          <p:cNvPr id="2" name="标题 1"/>
+          <p:cNvSpPr>
+            <a:spLocks noGrp="1"/>
+          </p:cNvSpPr>
+          <p:nvPr>
+            <p:ph type="title"/>
+          </p:nvPr>
+        </p:nvSpPr>
+        <p:spPr/>
+        <p:txBody>
+          <a:bodyPr/>
+          <a:p>
+            <a:r>
+              <a:rPr lang="en-US" altLang="zh-CN"/>
+              <a:t>Visualization</a:t>
+            </a:r>
+            <a:endParaRPr lang="en-US" altLang="zh-CN"/>
+          </a:p>
+        </p:txBody>
+      </p:sp>
+      <p:sp>
+        <p:nvSpPr>
+          <p:cNvPr id="3" name="内容占位符 2"/>
+          <p:cNvSpPr>
+            <a:spLocks noGrp="1"/>
+          </p:cNvSpPr>
+          <p:nvPr>
+            <p:ph idx="1"/>
+          </p:nvPr>
+        </p:nvSpPr>
+        <p:spPr/>
+        <p:txBody>
+          <a:bodyPr/>
+          <a:p>
+            <a:r>
+              <a:rPr lang="en-US" altLang="zh-CN"/>
+              <a:t>Grafana</a:t>
+            </a:r>
+            <a:endParaRPr lang="en-US" altLang="zh-CN"/>
+          </a:p>
+          <a:p>
+            <a:pPr lvl="1"/>
+            <a:r>
+              <a:rPr lang="en-US" altLang="zh-CN"/>
+              <a:t>https://medium.com/analytics-vidhya/grafana-with-postgresql-data-visualization-with-open-source-tool-36f5150fa290</a:t>
+            </a:r>
+            <a:endParaRPr lang="en-US" altLang="zh-CN"/>
+          </a:p>
+        </p:txBody>
+      </p:sp>
+    </p:spTree>
+    <p:custDataLst>
+      <p:tags r:id="rId1"/>
+    </p:custDataLst>
+  </p:cSld>
+  <p:clrMapOvr>
+    <a:masterClrMapping/>
+  </p:clrMapOvr>
+</p:sld>
+</file>
+
+<file path=ppt/slides/slide25.xml><?xml version="1.0" encoding="utf-8"?>
 <p:sld xmlns:a="http://schemas.openxmlformats.org/drawingml/2006/main" xmlns:r="http://schemas.openxmlformats.org/officeDocument/2006/relationships" xmlns:p="http://schemas.openxmlformats.org/presentationml/2006/main">
   <p:cSld>
     <p:spTree>
@@ -6726,10 +6844,10 @@
           <a:p>
             <a:pPr lvl="1"/>
             <a:r>
-              <a:rPr lang="en-US" altLang="zh-CN"/>
+              <a:rPr lang="en-US" altLang="zh-CN" b="1"/>
               <a:t>.open {db_name}</a:t>
             </a:r>
-            <a:endParaRPr lang="en-US" altLang="zh-CN"/>
+            <a:endParaRPr lang="en-US" altLang="zh-CN" b="1"/>
           </a:p>
           <a:p>
             <a:pPr lvl="1"/>
@@ -6742,10 +6860,10 @@
           <a:p>
             <a:pPr lvl="1"/>
             <a:r>
-              <a:rPr lang="en-US" altLang="zh-CN"/>
+              <a:rPr lang="en-US" altLang="zh-CN" b="1"/>
               <a:t>.schema {table_name}</a:t>
             </a:r>
-            <a:endParaRPr lang="en-US" altLang="zh-CN"/>
+            <a:endParaRPr lang="en-US" altLang="zh-CN" b="1"/>
           </a:p>
           <a:p>
             <a:pPr lvl="1"/>
@@ -7496,7 +7614,7 @@
         </p:spPr>
         <p:txBody>
           <a:bodyPr>
-            <a:normAutofit fontScale="70000"/>
+            <a:normAutofit fontScale="60000"/>
           </a:bodyPr>
           <a:p>
             <a:pPr lvl="0"/>
@@ -7564,7 +7682,19 @@
               </a:rPr>
               <a:t>sudo docker compose exec db pg_dump -U fishpano fishpano_db | gzip &gt;/tmp/20211221.pgdump.gz</a:t>
             </a:r>
-            <a:endParaRPr lang="en-US" altLang="zh-CN">
+            <a:endParaRPr lang="en-US" altLang="zh-CN" b="1">
+              <a:sym typeface="+mn-ea"/>
+            </a:endParaRPr>
+          </a:p>
+          <a:p>
+            <a:pPr lvl="2"/>
+            <a:r>
+              <a:rPr lang="en-US" altLang="zh-CN" b="1">
+                <a:sym typeface="+mn-ea"/>
+              </a:rPr>
+              <a:t>sudo docker compose exec db pg_dump -U panoservice panoservice_db &gt;db.20240719.sql</a:t>
+            </a:r>
+            <a:endParaRPr lang="en-US" altLang="zh-CN" b="1">
               <a:sym typeface="+mn-ea"/>
             </a:endParaRPr>
           </a:p>
@@ -8311,11 +8441,19 @@
 
 <file path=ppt/tags/tag31.xml><?xml version="1.0" encoding="utf-8"?>
 <p:tagLst xmlns:p="http://schemas.openxmlformats.org/presentationml/2006/main">
+  <p:tag name="KSO_WM_BEAUTIFY_FLAG" val="#wm#"/>
+  <p:tag name="KSO_WM_TEMPLATE_CATEGORY" val="custom"/>
+  <p:tag name="KSO_WM_TEMPLATE_INDEX" val="160402"/>
+</p:tagLst>
+</file>
+
+<file path=ppt/tags/tag32.xml><?xml version="1.0" encoding="utf-8"?>
+<p:tagLst xmlns:p="http://schemas.openxmlformats.org/presentationml/2006/main">
   <p:tag name="KSO_WM_UNIT_PLACING_PICTURE_USER_VIEWPORT" val="{&quot;height&quot;:10632,&quot;width&quot;:9120}"/>
 </p:tagLst>
 </file>
 
-<file path=ppt/tags/tag32.xml><?xml version="1.0" encoding="utf-8"?>
+<file path=ppt/tags/tag33.xml><?xml version="1.0" encoding="utf-8"?>
 <p:tagLst xmlns:p="http://schemas.openxmlformats.org/presentationml/2006/main">
   <p:tag name="KSO_WM_BEAUTIFY_FLAG" val="#wm#"/>
   <p:tag name="KSO_WM_TEMPLATE_CATEGORY" val="custom"/>
@@ -8323,7 +8461,7 @@
 </p:tagLst>
 </file>
 
-<file path=ppt/tags/tag33.xml><?xml version="1.0" encoding="utf-8"?>
+<file path=ppt/tags/tag34.xml><?xml version="1.0" encoding="utf-8"?>
 <p:tagLst xmlns:p="http://schemas.openxmlformats.org/presentationml/2006/main">
   <p:tag name="COMMONDATA" val="eyJoZGlkIjoiYjRhZjQ5NWVmZmQxNmM3NmNkNDYxNWRmNzNmMjA1ZDAifQ=="/>
   <p:tag name="KSO_WPP_MARK_KEY" val="e2f632b4-0a6a-40c4-bafa-21f0d0b1ac36"/>

--- a/Misc/DB-Notes.pptx
+++ b/Misc/DB-Notes.pptx
@@ -6050,7 +6050,7 @@
                       </a:pPr>
                       <a:r>
                         <a:rPr lang="en-US" altLang="zh-CN" sz="1000"/>
-                        <a:t>INSERT INTO table_name(column1, column2...) VALUES (value1, value2...);</a:t>
+                        <a:t>INSERT INTO table_name (column1, column2...) VALUES (value1, value2...);</a:t>
                       </a:r>
                       <a:endParaRPr lang="en-US" altLang="zh-CN" sz="1000"/>
                     </a:p>
@@ -6779,171 +6779,201 @@
         <p:spPr>
           <a:xfrm>
             <a:off x="838200" y="1211580"/>
-            <a:ext cx="5896610" cy="4969510"/>
+            <a:ext cx="5896610" cy="5298440"/>
           </a:xfrm>
         </p:spPr>
         <p:txBody>
-          <a:bodyPr>
-            <a:normAutofit fontScale="70000"/>
-          </a:bodyPr>
-          <a:p>
-            <a:r>
-              <a:rPr lang="en-US" altLang="zh-CN"/>
+          <a:bodyPr/>
+          <a:p>
+            <a:r>
+              <a:rPr lang="en-US" altLang="zh-CN" sz="1400"/>
               <a:t>References</a:t>
             </a:r>
-            <a:endParaRPr lang="en-US" altLang="zh-CN"/>
+            <a:endParaRPr lang="en-US" altLang="zh-CN" sz="1400"/>
           </a:p>
           <a:p>
             <a:pPr lvl="1"/>
             <a:r>
-              <a:rPr lang="en-US" altLang="zh-CN"/>
+              <a:rPr lang="en-US" altLang="zh-CN" sz="1200"/>
               <a:t>https://sqlite.org/index.html</a:t>
             </a:r>
-            <a:endParaRPr lang="en-US" altLang="zh-CN"/>
+            <a:endParaRPr lang="en-US" altLang="zh-CN" sz="1200"/>
           </a:p>
           <a:p>
             <a:pPr lvl="1"/>
             <a:r>
-              <a:rPr lang="en-US" altLang="zh-CN"/>
+              <a:rPr lang="en-US" altLang="zh-CN" sz="1200"/>
               <a:t>https://www.sqlite.org/lang_altertable.html</a:t>
             </a:r>
-            <a:endParaRPr lang="en-US" altLang="zh-CN"/>
+            <a:endParaRPr lang="en-US" altLang="zh-CN" sz="1200"/>
           </a:p>
           <a:p>
             <a:pPr lvl="0"/>
             <a:r>
-              <a:rPr lang="en-US" altLang="zh-CN"/>
+              <a:rPr lang="en-US" altLang="zh-CN" sz="1400"/>
               <a:t>Command line tools</a:t>
             </a:r>
-            <a:endParaRPr lang="en-US" altLang="zh-CN"/>
+            <a:endParaRPr lang="en-US" altLang="zh-CN" sz="1400"/>
           </a:p>
           <a:p>
             <a:pPr lvl="1"/>
             <a:r>
-              <a:rPr lang="en-US" altLang="zh-CN"/>
+              <a:rPr lang="en-US" altLang="zh-CN" sz="1200"/>
               <a:t>download </a:t>
             </a:r>
             <a:r>
-              <a:rPr lang="en-US" altLang="zh-CN" b="1"/>
+              <a:rPr lang="en-US" altLang="zh-CN" sz="1200" b="1"/>
               <a:t>sqlite3 </a:t>
             </a:r>
             <a:r>
-              <a:rPr lang="en-US" altLang="zh-CN"/>
+              <a:rPr lang="en-US" altLang="zh-CN" sz="1200"/>
               <a:t>from https://sqlite.org/download.html</a:t>
             </a:r>
-            <a:endParaRPr lang="en-US" altLang="zh-CN"/>
+            <a:endParaRPr lang="en-US" altLang="zh-CN" sz="1200"/>
           </a:p>
           <a:p>
             <a:pPr lvl="1"/>
             <a:r>
-              <a:rPr lang="en-US" altLang="zh-CN"/>
+              <a:rPr lang="en-US" altLang="zh-CN" sz="1200"/>
               <a:t>.quit	// exit</a:t>
             </a:r>
-            <a:endParaRPr lang="en-US" altLang="zh-CN"/>
+            <a:endParaRPr lang="en-US" altLang="zh-CN" sz="1200"/>
           </a:p>
           <a:p>
             <a:pPr lvl="1"/>
             <a:r>
-              <a:rPr lang="en-US" altLang="zh-CN" b="1"/>
+              <a:rPr lang="en-US" altLang="zh-CN" sz="1200" b="1"/>
               <a:t>.open {db_name}</a:t>
             </a:r>
-            <a:endParaRPr lang="en-US" altLang="zh-CN" b="1"/>
+            <a:endParaRPr lang="en-US" altLang="zh-CN" sz="1200" b="1"/>
           </a:p>
           <a:p>
             <a:pPr lvl="1"/>
             <a:r>
-              <a:rPr lang="en-US" altLang="zh-CN"/>
+              <a:rPr lang="en-US" altLang="zh-CN" sz="1200"/>
               <a:t>.tables</a:t>
             </a:r>
-            <a:endParaRPr lang="en-US" altLang="zh-CN"/>
+            <a:endParaRPr lang="en-US" altLang="zh-CN" sz="1200"/>
           </a:p>
           <a:p>
             <a:pPr lvl="1"/>
             <a:r>
-              <a:rPr lang="en-US" altLang="zh-CN" b="1"/>
+              <a:rPr lang="en-US" altLang="zh-CN" sz="1200" b="1"/>
               <a:t>.schema {table_name}</a:t>
             </a:r>
-            <a:endParaRPr lang="en-US" altLang="zh-CN" b="1"/>
+            <a:endParaRPr lang="en-US" altLang="zh-CN" sz="1200" b="1"/>
           </a:p>
           <a:p>
             <a:pPr lvl="1"/>
             <a:r>
-              <a:rPr lang="en-US" altLang="zh-CN"/>
+              <a:rPr lang="en-US" altLang="zh-CN" sz="1200"/>
               <a:t>Dump db to sql</a:t>
             </a:r>
-            <a:endParaRPr lang="en-US" altLang="zh-CN"/>
+            <a:endParaRPr lang="en-US" altLang="zh-CN" sz="1200"/>
           </a:p>
           <a:p>
             <a:pPr lvl="2"/>
             <a:r>
-              <a:rPr lang="en-US" altLang="zh-CN" sz="1800"/>
+              <a:rPr lang="en-US" altLang="zh-CN" sz="1000"/>
               <a:t>.once db.sql</a:t>
             </a:r>
-            <a:endParaRPr lang="en-US" altLang="zh-CN" sz="1800"/>
+            <a:endParaRPr lang="en-US" altLang="zh-CN" sz="1000"/>
           </a:p>
           <a:p>
             <a:pPr lvl="2"/>
             <a:r>
-              <a:rPr lang="en-US" altLang="zh-CN" sz="1800"/>
+              <a:rPr lang="en-US" altLang="zh-CN" sz="1000"/>
               <a:t>.dump</a:t>
             </a:r>
-            <a:endParaRPr lang="en-US" altLang="zh-CN"/>
+            <a:endParaRPr lang="en-US" altLang="zh-CN" sz="1000"/>
           </a:p>
           <a:p>
             <a:pPr lvl="1"/>
             <a:r>
-              <a:rPr lang="en-US" altLang="zh-CN"/>
+              <a:rPr lang="en-US" altLang="zh-CN" sz="1200"/>
               <a:t>Dump table data to csv</a:t>
             </a:r>
-            <a:endParaRPr lang="en-US" altLang="zh-CN"/>
+            <a:endParaRPr lang="en-US" altLang="zh-CN" sz="1200"/>
           </a:p>
           <a:p>
             <a:pPr lvl="2"/>
             <a:r>
-              <a:rPr lang="en-US" altLang="zh-CN"/>
+              <a:rPr lang="en-US" altLang="zh-CN" sz="1000"/>
               <a:t>.headers on</a:t>
             </a:r>
-            <a:endParaRPr lang="en-US" altLang="zh-CN"/>
+            <a:endParaRPr lang="en-US" altLang="zh-CN" sz="1000"/>
           </a:p>
           <a:p>
             <a:pPr lvl="2"/>
             <a:r>
-              <a:rPr lang="en-US" altLang="zh-CN"/>
+              <a:rPr lang="en-US" altLang="zh-CN" sz="1000"/>
               <a:t>.mode csv</a:t>
             </a:r>
-            <a:endParaRPr lang="en-US" altLang="zh-CN"/>
+            <a:endParaRPr lang="en-US" altLang="zh-CN" sz="1000"/>
           </a:p>
           <a:p>
             <a:pPr lvl="2"/>
             <a:r>
-              <a:rPr lang="en-US" altLang="zh-CN"/>
+              <a:rPr lang="en-US" altLang="zh-CN" sz="1000"/>
               <a:t>.once ‘user.csv’</a:t>
             </a:r>
-            <a:endParaRPr lang="en-US" altLang="zh-CN"/>
+            <a:endParaRPr lang="en-US" altLang="zh-CN" sz="1000"/>
           </a:p>
           <a:p>
             <a:pPr lvl="2"/>
             <a:r>
-              <a:rPr lang="en-US" altLang="zh-CN"/>
+              <a:rPr lang="en-US" altLang="zh-CN" sz="1000"/>
               <a:t>select * from user;</a:t>
             </a:r>
-            <a:endParaRPr lang="en-US" altLang="zh-CN"/>
+            <a:endParaRPr lang="en-US" altLang="zh-CN" sz="1000"/>
           </a:p>
           <a:p>
             <a:pPr lvl="1"/>
             <a:r>
-              <a:rPr lang="en-US" altLang="zh-CN"/>
+              <a:rPr lang="en-US" altLang="zh-CN" sz="1200"/>
               <a:t>Run a sql script</a:t>
             </a:r>
-            <a:endParaRPr lang="en-US" altLang="zh-CN"/>
+            <a:endParaRPr lang="en-US" altLang="zh-CN" sz="1200"/>
           </a:p>
           <a:p>
             <a:pPr lvl="2"/>
             <a:r>
-              <a:rPr lang="en-US" altLang="zh-CN"/>
+              <a:rPr lang="en-US" altLang="zh-CN" sz="1000"/>
               <a:t>.read init.sql</a:t>
             </a:r>
-            <a:endParaRPr lang="en-US" altLang="zh-CN"/>
+            <a:endParaRPr lang="en-US" altLang="zh-CN" sz="1000"/>
+          </a:p>
+          <a:p>
+            <a:pPr lvl="1"/>
+            <a:r>
+              <a:rPr lang="en-US" altLang="zh-CN" sz="1200">
+                <a:sym typeface="+mn-ea"/>
+              </a:rPr>
+              <a:t>Create table from csv</a:t>
+            </a:r>
+            <a:endParaRPr lang="en-US" altLang="zh-CN" sz="1200"/>
+          </a:p>
+          <a:p>
+            <a:pPr lvl="2"/>
+            <a:r>
+              <a:rPr lang="en-US" altLang="zh-CN" sz="1200">
+                <a:sym typeface="+mn-ea"/>
+              </a:rPr>
+              <a:t>.mode csv</a:t>
+            </a:r>
+            <a:endParaRPr lang="en-US" altLang="zh-CN" sz="1200"/>
+          </a:p>
+          <a:p>
+            <a:pPr lvl="2"/>
+            <a:r>
+              <a:rPr lang="en-US" altLang="zh-CN" sz="1200">
+                <a:sym typeface="+mn-ea"/>
+              </a:rPr>
+              <a:t>.import product.csv product</a:t>
+            </a:r>
+            <a:endParaRPr lang="en-US" altLang="zh-CN" sz="1200">
+              <a:sym typeface="+mn-ea"/>
+            </a:endParaRPr>
           </a:p>
         </p:txBody>
       </p:sp>
@@ -7133,28 +7163,40 @@
             </a:lvl9pPr>
           </a:lstStyle>
           <a:p>
+            <a:pPr lvl="0"/>
+            <a:r>
+              <a:rPr lang="en-US" altLang="zh-CN" sz="1800"/>
+              <a:t>Build from source</a:t>
+            </a:r>
+            <a:endParaRPr lang="en-US" altLang="zh-CN" sz="1800"/>
+          </a:p>
+          <a:p>
             <a:pPr lvl="1"/>
             <a:r>
-              <a:rPr lang="en-US" altLang="zh-CN"/>
-              <a:t>Create table from csv</a:t>
-            </a:r>
-            <a:endParaRPr lang="en-US" altLang="zh-CN"/>
-          </a:p>
-          <a:p>
-            <a:pPr lvl="2"/>
-            <a:r>
-              <a:rPr lang="en-US" altLang="zh-CN"/>
-              <a:t>.mode csv</a:t>
-            </a:r>
-            <a:endParaRPr lang="en-US" altLang="zh-CN"/>
-          </a:p>
-          <a:p>
-            <a:pPr lvl="2"/>
-            <a:r>
-              <a:rPr lang="en-US" altLang="zh-CN"/>
-              <a:t>.import product.csv product</a:t>
-            </a:r>
-            <a:endParaRPr lang="en-US" altLang="zh-CN"/>
+              <a:rPr lang="en-US" altLang="zh-CN" sz="1600"/>
+              <a:t>download sqlite-autoconf-3510300.tar.gz from </a:t>
+            </a:r>
+            <a:r>
+              <a:rPr lang="en-US" altLang="zh-CN" sz="1600">
+                <a:sym typeface="+mn-ea"/>
+              </a:rPr>
+              <a:t>https://www.sqlite.org/download.html</a:t>
+            </a:r>
+            <a:endParaRPr lang="en-US" altLang="zh-CN" sz="1600">
+              <a:sym typeface="+mn-ea"/>
+            </a:endParaRPr>
+          </a:p>
+          <a:p>
+            <a:pPr lvl="1"/>
+            <a:r>
+              <a:rPr lang="en-US" altLang="zh-CN" sz="1600">
+                <a:sym typeface="+mn-ea"/>
+              </a:rPr>
+              <a:t>./configure &amp;&amp; make -j &amp;&amp; sudo make install </a:t>
+            </a:r>
+            <a:endParaRPr lang="en-US" altLang="zh-CN" sz="1600">
+              <a:sym typeface="+mn-ea"/>
+            </a:endParaRPr>
           </a:p>
         </p:txBody>
       </p:sp>
@@ -7275,12 +7317,12 @@
         <p:spPr>
           <a:xfrm>
             <a:off x="838200" y="1211580"/>
-            <a:ext cx="6779260" cy="4549140"/>
+            <a:ext cx="6779260" cy="5013325"/>
           </a:xfrm>
         </p:spPr>
         <p:txBody>
           <a:bodyPr>
-            <a:normAutofit fontScale="90000" lnSpcReduction="20000"/>
+            <a:normAutofit fontScale="70000"/>
           </a:bodyPr>
           <a:p>
             <a:pPr lvl="0"/>
@@ -7415,6 +7457,22 @@
             <a:r>
               <a:rPr lang="en-US" altLang="zh-CN"/>
               <a:t>createdb -U fishpano fishpano_db</a:t>
+            </a:r>
+            <a:endParaRPr lang="en-US" altLang="zh-CN"/>
+          </a:p>
+          <a:p>
+            <a:pPr lvl="0"/>
+            <a:r>
+              <a:rPr lang="en-US" altLang="zh-CN"/>
+              <a:t>Misc</a:t>
+            </a:r>
+            <a:endParaRPr lang="en-US" altLang="zh-CN"/>
+          </a:p>
+          <a:p>
+            <a:pPr lvl="1"/>
+            <a:r>
+              <a:rPr lang="en-US" altLang="zh-CN"/>
+              <a:t>default max_connections is typically 100</a:t>
             </a:r>
             <a:endParaRPr lang="en-US" altLang="zh-CN"/>
           </a:p>
@@ -8035,6 +8093,22 @@
             <a:r>
               <a:rPr lang="en-US" altLang="zh-CN"/>
               <a:t>pg_dump  -h localhost -p 5432 -U user -W --table="table-name" --data-only --column-inserts database-name &gt; table.sql</a:t>
+            </a:r>
+            <a:endParaRPr lang="en-US" altLang="zh-CN"/>
+          </a:p>
+          <a:p>
+            <a:pPr lvl="0"/>
+            <a:r>
+              <a:rPr lang="en-US" altLang="zh-CN"/>
+              <a:t>See what’s going on</a:t>
+            </a:r>
+            <a:endParaRPr lang="en-US" altLang="zh-CN"/>
+          </a:p>
+          <a:p>
+            <a:pPr lvl="1"/>
+            <a:r>
+              <a:rPr lang="en-US" altLang="zh-CN"/>
+              <a:t>SELECT pid, query, state, now() - query_start AS duration FROM pg_stat_activity WHERE state &lt;&gt; 'idle' AND query NOT LIKE '%pg_stat_activity%';</a:t>
             </a:r>
             <a:endParaRPr lang="en-US" altLang="zh-CN"/>
           </a:p>
@@ -8537,7 +8611,7 @@
 
 <file path=ppt/tags/tag7.xml><?xml version="1.0" encoding="utf-8"?>
 <p:tagLst xmlns:p="http://schemas.openxmlformats.org/presentationml/2006/main">
-  <p:tag name="KSO_WM_UNIT_TABLE_BEAUTIFY" val="smartTable{7fbdd85a-ad8d-4bda-9b13-9f34e8e13f99}"/>
+  <p:tag name="KSO_WM_UNIT_TABLE_BEAUTIFY" val="smartTable{db681699-ff8a-4d65-bfe7-384b546ac036}"/>
   <p:tag name="TABLE_ENDDRAG_ORIGIN_RECT" val="846*330"/>
   <p:tag name="TABLE_ENDDRAG_RECT" val="55*79*846*330"/>
 </p:tagLst>
